--- a/exports/pptx/lessons/primary-module-01-what-is-iks/day-06-math-story.pptx
+++ b/exports/pptx/lessons/primary-module-01-what-is-iks/day-06-math-story.pptx
@@ -15,9 +15,12 @@
     <p:sldId id="263" r:id="rId9"/>
     <p:sldId id="264" r:id="rId10"/>
     <p:sldId id="265" r:id="rId11"/>
+    <p:sldId id="266" r:id="rId12"/>
+    <p:sldId id="267" r:id="rId13"/>
+    <p:sldId id="268" r:id="rId14"/>
   </p:sldIdLst>
   <p:notesMasterIdLst>
-    <p:notesMasterId r:id="rId12"/>
+    <p:notesMasterId r:id="rId15"/>
   </p:notesMasterIdLst>
   <p:sldSz cx="9144000" cy="5143500"/>
   <p:notesSz cx="5143500" cy="9144000"/>
@@ -623,6 +626,270 @@
             <a:fld id="{F7021451-1387-4CA6-816F-3879F97B5CBC}" type="slidenum">
               <a:rPr lang="en-US"/>
               <a:t>10</a:t>
+            </a:fld>
+            <a:endParaRPr lang="en-US"/>
+          </a:p>
+        </p:txBody>
+      </p:sp>
+    </p:spTree>
+    <p:extLst>
+      <p:ext uri="{BB962C8B-B14F-4D97-AF65-F5344CB8AC3E}">
+        <p14:creationId xmlns:p14="http://schemas.microsoft.com/office/powerpoint/2010/main" val="1024086991"/>
+      </p:ext>
+    </p:extLst>
+  </p:cSld>
+  <p:clrMapOvr>
+    <a:masterClrMapping/>
+  </p:clrMapOvr>
+</p:notes>
+</file>
+
+<file path=ppt/notesSlides/notesSlide11.xml><?xml version="1.0" encoding="utf-8"?>
+<p:notes xmlns:a="http://schemas.openxmlformats.org/drawingml/2006/main" xmlns:r="http://schemas.openxmlformats.org/officeDocument/2006/relationships" xmlns:p="http://schemas.openxmlformats.org/presentationml/2006/main">
+  <p:cSld>
+    <p:spTree>
+      <p:nvGrpSpPr>
+        <p:cNvPr id="1" name=""/>
+        <p:cNvGrpSpPr/>
+        <p:nvPr/>
+      </p:nvGrpSpPr>
+      <p:grpSpPr>
+        <a:xfrm>
+          <a:off x="0" y="0"/>
+          <a:ext cx="0" cy="0"/>
+          <a:chOff x="0" y="0"/>
+          <a:chExt cx="0" cy="0"/>
+        </a:xfrm>
+      </p:grpSpPr>
+      <p:sp>
+        <p:nvSpPr>
+          <p:cNvPr id="2" name="Slide Image Placeholder 1"/>
+          <p:cNvSpPr>
+            <a:spLocks noGrp="1" noRot="1" noChangeAspect="1"/>
+          </p:cNvSpPr>
+          <p:nvPr>
+            <p:ph type="sldImg"/>
+          </p:nvPr>
+        </p:nvSpPr>
+        <p:spPr/>
+      </p:sp>
+      <p:sp>
+        <p:nvSpPr>
+          <p:cNvPr id="3" name="Notes Placeholder 2"/>
+          <p:cNvSpPr>
+            <a:spLocks noGrp="1"/>
+          </p:cNvSpPr>
+          <p:nvPr>
+            <p:ph type="body" idx="1"/>
+          </p:nvPr>
+        </p:nvSpPr>
+        <p:spPr/>
+        <p:txBody>
+          <a:bodyPr/>
+          <a:lstStyle/>
+          <a:p>
+            <a:r>
+              <a:rPr lang="en-US" dirty="0"/>
+              <a:t/>
+            </a:r>
+            <a:endParaRPr lang="en-US" dirty="0"/>
+          </a:p>
+        </p:txBody>
+      </p:sp>
+      <p:sp>
+        <p:nvSpPr>
+          <p:cNvPr id="4" name="Slide Number Placeholder 3"/>
+          <p:cNvSpPr>
+            <a:spLocks noGrp="1"/>
+          </p:cNvSpPr>
+          <p:nvPr>
+            <p:ph type="sldNum" sz="quarter" idx="10"/>
+          </p:nvPr>
+        </p:nvSpPr>
+        <p:spPr/>
+        <p:txBody>
+          <a:bodyPr/>
+          <a:lstStyle/>
+          <a:p>
+            <a:fld id="{F7021451-1387-4CA6-816F-3879F97B5CBC}" type="slidenum">
+              <a:rPr lang="en-US"/>
+              <a:t>11</a:t>
+            </a:fld>
+            <a:endParaRPr lang="en-US"/>
+          </a:p>
+        </p:txBody>
+      </p:sp>
+    </p:spTree>
+    <p:extLst>
+      <p:ext uri="{BB962C8B-B14F-4D97-AF65-F5344CB8AC3E}">
+        <p14:creationId xmlns:p14="http://schemas.microsoft.com/office/powerpoint/2010/main" val="1024086991"/>
+      </p:ext>
+    </p:extLst>
+  </p:cSld>
+  <p:clrMapOvr>
+    <a:masterClrMapping/>
+  </p:clrMapOvr>
+</p:notes>
+</file>
+
+<file path=ppt/notesSlides/notesSlide12.xml><?xml version="1.0" encoding="utf-8"?>
+<p:notes xmlns:a="http://schemas.openxmlformats.org/drawingml/2006/main" xmlns:r="http://schemas.openxmlformats.org/officeDocument/2006/relationships" xmlns:p="http://schemas.openxmlformats.org/presentationml/2006/main">
+  <p:cSld>
+    <p:spTree>
+      <p:nvGrpSpPr>
+        <p:cNvPr id="1" name=""/>
+        <p:cNvGrpSpPr/>
+        <p:nvPr/>
+      </p:nvGrpSpPr>
+      <p:grpSpPr>
+        <a:xfrm>
+          <a:off x="0" y="0"/>
+          <a:ext cx="0" cy="0"/>
+          <a:chOff x="0" y="0"/>
+          <a:chExt cx="0" cy="0"/>
+        </a:xfrm>
+      </p:grpSpPr>
+      <p:sp>
+        <p:nvSpPr>
+          <p:cNvPr id="2" name="Slide Image Placeholder 1"/>
+          <p:cNvSpPr>
+            <a:spLocks noGrp="1" noRot="1" noChangeAspect="1"/>
+          </p:cNvSpPr>
+          <p:nvPr>
+            <p:ph type="sldImg"/>
+          </p:nvPr>
+        </p:nvSpPr>
+        <p:spPr/>
+      </p:sp>
+      <p:sp>
+        <p:nvSpPr>
+          <p:cNvPr id="3" name="Notes Placeholder 2"/>
+          <p:cNvSpPr>
+            <a:spLocks noGrp="1"/>
+          </p:cNvSpPr>
+          <p:nvPr>
+            <p:ph type="body" idx="1"/>
+          </p:nvPr>
+        </p:nvSpPr>
+        <p:spPr/>
+        <p:txBody>
+          <a:bodyPr/>
+          <a:lstStyle/>
+          <a:p>
+            <a:r>
+              <a:rPr lang="en-US" dirty="0"/>
+              <a:t/>
+            </a:r>
+            <a:endParaRPr lang="en-US" dirty="0"/>
+          </a:p>
+        </p:txBody>
+      </p:sp>
+      <p:sp>
+        <p:nvSpPr>
+          <p:cNvPr id="4" name="Slide Number Placeholder 3"/>
+          <p:cNvSpPr>
+            <a:spLocks noGrp="1"/>
+          </p:cNvSpPr>
+          <p:nvPr>
+            <p:ph type="sldNum" sz="quarter" idx="10"/>
+          </p:nvPr>
+        </p:nvSpPr>
+        <p:spPr/>
+        <p:txBody>
+          <a:bodyPr/>
+          <a:lstStyle/>
+          <a:p>
+            <a:fld id="{F7021451-1387-4CA6-816F-3879F97B5CBC}" type="slidenum">
+              <a:rPr lang="en-US"/>
+              <a:t>12</a:t>
+            </a:fld>
+            <a:endParaRPr lang="en-US"/>
+          </a:p>
+        </p:txBody>
+      </p:sp>
+    </p:spTree>
+    <p:extLst>
+      <p:ext uri="{BB962C8B-B14F-4D97-AF65-F5344CB8AC3E}">
+        <p14:creationId xmlns:p14="http://schemas.microsoft.com/office/powerpoint/2010/main" val="1024086991"/>
+      </p:ext>
+    </p:extLst>
+  </p:cSld>
+  <p:clrMapOvr>
+    <a:masterClrMapping/>
+  </p:clrMapOvr>
+</p:notes>
+</file>
+
+<file path=ppt/notesSlides/notesSlide13.xml><?xml version="1.0" encoding="utf-8"?>
+<p:notes xmlns:a="http://schemas.openxmlformats.org/drawingml/2006/main" xmlns:r="http://schemas.openxmlformats.org/officeDocument/2006/relationships" xmlns:p="http://schemas.openxmlformats.org/presentationml/2006/main">
+  <p:cSld>
+    <p:spTree>
+      <p:nvGrpSpPr>
+        <p:cNvPr id="1" name=""/>
+        <p:cNvGrpSpPr/>
+        <p:nvPr/>
+      </p:nvGrpSpPr>
+      <p:grpSpPr>
+        <a:xfrm>
+          <a:off x="0" y="0"/>
+          <a:ext cx="0" cy="0"/>
+          <a:chOff x="0" y="0"/>
+          <a:chExt cx="0" cy="0"/>
+        </a:xfrm>
+      </p:grpSpPr>
+      <p:sp>
+        <p:nvSpPr>
+          <p:cNvPr id="2" name="Slide Image Placeholder 1"/>
+          <p:cNvSpPr>
+            <a:spLocks noGrp="1" noRot="1" noChangeAspect="1"/>
+          </p:cNvSpPr>
+          <p:nvPr>
+            <p:ph type="sldImg"/>
+          </p:nvPr>
+        </p:nvSpPr>
+        <p:spPr/>
+      </p:sp>
+      <p:sp>
+        <p:nvSpPr>
+          <p:cNvPr id="3" name="Notes Placeholder 2"/>
+          <p:cNvSpPr>
+            <a:spLocks noGrp="1"/>
+          </p:cNvSpPr>
+          <p:nvPr>
+            <p:ph type="body" idx="1"/>
+          </p:nvPr>
+        </p:nvSpPr>
+        <p:spPr/>
+        <p:txBody>
+          <a:bodyPr/>
+          <a:lstStyle/>
+          <a:p>
+            <a:r>
+              <a:rPr lang="en-US" dirty="0"/>
+              <a:t/>
+            </a:r>
+            <a:endParaRPr lang="en-US" dirty="0"/>
+          </a:p>
+        </p:txBody>
+      </p:sp>
+      <p:sp>
+        <p:nvSpPr>
+          <p:cNvPr id="4" name="Slide Number Placeholder 3"/>
+          <p:cNvSpPr>
+            <a:spLocks noGrp="1"/>
+          </p:cNvSpPr>
+          <p:nvPr>
+            <p:ph type="sldNum" sz="quarter" idx="10"/>
+          </p:nvPr>
+        </p:nvSpPr>
+        <p:spPr/>
+        <p:txBody>
+          <a:bodyPr/>
+          <a:lstStyle/>
+          <a:p>
+            <a:fld id="{F7021451-1387-4CA6-816F-3879F97B5CBC}" type="slidenum">
+              <a:rPr lang="en-US"/>
+              <a:t>13</a:t>
             </a:fld>
             <a:endParaRPr lang="en-US"/>
           </a:p>
@@ -1876,102 +2143,6 @@
         </p:nvSpPr>
         <p:spPr>
           <a:xfrm>
-            <a:off x="406301" y="1223963"/>
-            <a:ext cx="8498026" cy="274290"/>
-          </a:xfrm>
-          <a:prstGeom prst="rect">
-            <a:avLst/>
-          </a:prstGeom>
-          <a:noFill/>
-          <a:ln/>
-        </p:spPr>
-        <p:txBody>
-          <a:bodyPr wrap="square" lIns="0" tIns="0" rIns="0" bIns="0" rtlCol="0" anchor="t"/>
-          <a:lstStyle/>
-          <a:p>
-            <a:pPr algn="l" indent="0" marL="0">
-              <a:lnSpc>
-                <a:spcPts val="2160"/>
-              </a:lnSpc>
-              <a:spcBef>
-                <a:spcPts val="600"/>
-              </a:spcBef>
-              <a:spcAft>
-                <a:spcPts val="800"/>
-              </a:spcAft>
-              <a:buNone/>
-            </a:pPr>
-            <a:r>
-              <a:rPr lang="en-US" sz="1800" b="1" dirty="0">
-                <a:solidFill>
-                  <a:srgbClr val="E07A5F"/>
-                </a:solidFill>
-                <a:latin typeface="Georgia" pitchFamily="34" charset="0"/>
-                <a:ea typeface="Georgia" pitchFamily="34" charset="-122"/>
-                <a:cs typeface="Georgia" pitchFamily="34" charset="-120"/>
-              </a:rPr>
-              <a:t>Goal</a:t>
-            </a:r>
-            <a:endParaRPr lang="en-US" sz="1800" dirty="0"/>
-          </a:p>
-        </p:txBody>
-      </p:sp>
-      <p:sp>
-        <p:nvSpPr>
-          <p:cNvPr id="6" name="Text 4"/>
-          <p:cNvSpPr/>
-          <p:nvPr/>
-        </p:nvSpPr>
-        <p:spPr>
-          <a:xfrm>
-            <a:off x="406301" y="1637854"/>
-            <a:ext cx="8498026" cy="213271"/>
-          </a:xfrm>
-          <a:prstGeom prst="rect">
-            <a:avLst/>
-          </a:prstGeom>
-          <a:noFill/>
-          <a:ln/>
-        </p:spPr>
-        <p:txBody>
-          <a:bodyPr wrap="square" lIns="0" tIns="0" rIns="0" bIns="0" rtlCol="0" anchor="t"/>
-          <a:lstStyle/>
-          <a:p>
-            <a:pPr algn="l" indent="0" marL="0">
-              <a:lnSpc>
-                <a:spcPts val="1680"/>
-              </a:lnSpc>
-              <a:spcBef>
-                <a:spcPts val="300"/>
-              </a:spcBef>
-              <a:spcAft>
-                <a:spcPts val="300"/>
-              </a:spcAft>
-              <a:buNone/>
-            </a:pPr>
-            <a:r>
-              <a:rPr lang="en-US" sz="1200" dirty="0">
-                <a:solidFill>
-                  <a:srgbClr val="2C2C2C"/>
-                </a:solidFill>
-                <a:latin typeface="Verdana" pitchFamily="34" charset="0"/>
-                <a:ea typeface="Verdana" pitchFamily="34" charset="-122"/>
-                <a:cs typeface="Verdana" pitchFamily="34" charset="-120"/>
-              </a:rPr>
-              <a:t>Children hear a story about Indian mathematicians and try one fast trick.</a:t>
-            </a:r>
-            <a:endParaRPr lang="en-US" sz="1200" dirty="0"/>
-          </a:p>
-        </p:txBody>
-      </p:sp>
-      <p:sp>
-        <p:nvSpPr>
-          <p:cNvPr id="7" name="Text 5"/>
-          <p:cNvSpPr/>
-          <p:nvPr/>
-        </p:nvSpPr>
-        <p:spPr>
-          <a:xfrm>
             <a:off x="406301" y="4434929"/>
             <a:ext cx="8498026" cy="213271"/>
           </a:xfrm>
@@ -2116,7 +2287,7 @@
                 <a:ea typeface="Georgia" pitchFamily="34" charset="-122"/>
                 <a:cs typeface="Georgia" pitchFamily="34" charset="-120"/>
               </a:rPr>
-              <a:t>Teacher notes</a:t>
+              <a:t>Show + chant (3 min)</a:t>
             </a:r>
             <a:endParaRPr lang="en-US" sz="1800" dirty="0"/>
           </a:p>
@@ -2130,7 +2301,7 @@
         </p:nvSpPr>
         <p:spPr>
           <a:xfrm>
-            <a:off x="406301" y="870942"/>
+            <a:off x="406301" y="4434929"/>
             <a:ext cx="8498026" cy="213271"/>
           </a:xfrm>
           <a:prstGeom prst="rect">
@@ -2164,7 +2335,635 @@
                 <a:ea typeface="Verdana" pitchFamily="34" charset="-122"/>
                 <a:cs typeface="Verdana" pitchFamily="34" charset="-120"/>
               </a:rPr>
-              <a:t>– Module 5 is the full Vedic Math module (the dot method). Today is a different trick to keep things fresh.</a:t>
+              <a:t>Primary ·  · IKS Curriculum</a:t>
+            </a:r>
+            <a:endParaRPr lang="en-US" sz="1200" dirty="0"/>
+          </a:p>
+        </p:txBody>
+      </p:sp>
+    </p:spTree>
+  </p:cSld>
+  <p:clrMapOvr>
+    <a:masterClrMapping/>
+  </p:clrMapOvr>
+</p:sld>
+</file>
+
+<file path=ppt/slides/slide11.xml><?xml version="1.0" encoding="utf-8"?>
+<p:sld xmlns:a="http://schemas.openxmlformats.org/drawingml/2006/main" xmlns:r="http://schemas.openxmlformats.org/officeDocument/2006/relationships" xmlns:p="http://schemas.openxmlformats.org/presentationml/2006/main">
+  <p:cSld name="Slide 11">
+    <p:bg>
+      <p:bgPr>
+        <a:solidFill>
+          <a:srgbClr val="FAF7F2"/>
+        </a:solidFill>
+      </p:bgPr>
+    </p:bg>
+    <p:spTree>
+      <p:nvGrpSpPr>
+        <p:cNvPr id="1" name=""/>
+        <p:cNvGrpSpPr/>
+        <p:nvPr/>
+      </p:nvGrpSpPr>
+      <p:grpSpPr>
+        <a:xfrm>
+          <a:off x="0" y="0"/>
+          <a:ext cx="0" cy="0"/>
+          <a:chOff x="0" y="0"/>
+          <a:chExt cx="0" cy="0"/>
+        </a:xfrm>
+      </p:grpSpPr>
+      <p:sp>
+        <p:nvSpPr>
+          <p:cNvPr id="2" name="Text 0"/>
+          <p:cNvSpPr/>
+          <p:nvPr/>
+        </p:nvSpPr>
+        <p:spPr>
+          <a:xfrm>
+            <a:off x="0" y="0"/>
+            <a:ext cx="9144000" cy="101501"/>
+          </a:xfrm>
+          <a:prstGeom prst="rect">
+            <a:avLst/>
+          </a:prstGeom>
+          <a:solidFill>
+            <a:srgbClr val="87A96B"/>
+          </a:solidFill>
+          <a:ln/>
+        </p:spPr>
+        <p:txBody>
+          <a:bodyPr wrap="square" rtlCol="0" anchor="ctr"/>
+          <a:lstStyle/>
+          <a:p>
+            <a:pPr indent="0" marL="0">
+              <a:buNone/>
+            </a:pPr>
+            <a:endParaRPr lang="en-US" dirty="0"/>
+          </a:p>
+        </p:txBody>
+      </p:sp>
+      <p:sp>
+        <p:nvSpPr>
+          <p:cNvPr id="3" name="Text 1"/>
+          <p:cNvSpPr/>
+          <p:nvPr/>
+        </p:nvSpPr>
+        <p:spPr>
+          <a:xfrm>
+            <a:off x="406301" y="457051"/>
+            <a:ext cx="8498026" cy="274290"/>
+          </a:xfrm>
+          <a:prstGeom prst="rect">
+            <a:avLst/>
+          </a:prstGeom>
+          <a:noFill/>
+          <a:ln/>
+        </p:spPr>
+        <p:txBody>
+          <a:bodyPr wrap="square" lIns="0" tIns="0" rIns="0" bIns="0" rtlCol="0" anchor="t"/>
+          <a:lstStyle/>
+          <a:p>
+            <a:pPr algn="l" indent="0" marL="0">
+              <a:lnSpc>
+                <a:spcPts val="2160"/>
+              </a:lnSpc>
+              <a:spcBef>
+                <a:spcPts val="600"/>
+              </a:spcBef>
+              <a:spcAft>
+                <a:spcPts val="800"/>
+              </a:spcAft>
+              <a:buNone/>
+            </a:pPr>
+            <a:r>
+              <a:rPr lang="en-US" sz="1800" b="1" dirty="0">
+                <a:solidFill>
+                  <a:srgbClr val="E07A5F"/>
+                </a:solidFill>
+                <a:latin typeface="Georgia" pitchFamily="34" charset="0"/>
+                <a:ea typeface="Georgia" pitchFamily="34" charset="-122"/>
+                <a:cs typeface="Georgia" pitchFamily="34" charset="-120"/>
+              </a:rPr>
+              <a:t>Homework</a:t>
+            </a:r>
+            <a:endParaRPr lang="en-US" sz="1800" dirty="0"/>
+          </a:p>
+        </p:txBody>
+      </p:sp>
+      <p:sp>
+        <p:nvSpPr>
+          <p:cNvPr id="4" name="Text 2"/>
+          <p:cNvSpPr/>
+          <p:nvPr/>
+        </p:nvSpPr>
+        <p:spPr>
+          <a:xfrm>
+            <a:off x="634901" y="883593"/>
+            <a:ext cx="8102798" cy="281880"/>
+          </a:xfrm>
+          <a:prstGeom prst="rect">
+            <a:avLst/>
+          </a:prstGeom>
+          <a:noFill/>
+          <a:ln/>
+        </p:spPr>
+        <p:txBody>
+          <a:bodyPr wrap="square" lIns="0" tIns="0" rIns="0" bIns="0" rtlCol="0" anchor="t"/>
+          <a:lstStyle/>
+          <a:p>
+            <a:pPr algn="l" marL="342900" indent="-342900">
+              <a:lnSpc>
+                <a:spcPts val="1620"/>
+              </a:lnSpc>
+              <a:spcAft>
+                <a:spcPts val="300"/>
+              </a:spcAft>
+              <a:buSzPct val="100000"/>
+              <a:buChar char="•"/>
+            </a:pPr>
+            <a:r>
+              <a:rPr lang="en-US" sz="1200" dirty="0">
+                <a:solidFill>
+                  <a:srgbClr val="2C2C2C"/>
+                </a:solidFill>
+                <a:latin typeface="Verdana" pitchFamily="34" charset="0"/>
+                <a:ea typeface="Verdana" pitchFamily="34" charset="-122"/>
+                <a:cs typeface="Verdana" pitchFamily="34" charset="-120"/>
+              </a:rPr>
+              <a:t>Try 5 multiplication by 11 problems with a parent.</a:t>
+            </a:r>
+            <a:endParaRPr lang="en-US" sz="1200" dirty="0"/>
+          </a:p>
+        </p:txBody>
+      </p:sp>
+      <p:sp>
+        <p:nvSpPr>
+          <p:cNvPr id="5" name="Text 3"/>
+          <p:cNvSpPr/>
+          <p:nvPr/>
+        </p:nvSpPr>
+        <p:spPr>
+          <a:xfrm>
+            <a:off x="406301" y="4434929"/>
+            <a:ext cx="8498026" cy="213271"/>
+          </a:xfrm>
+          <a:prstGeom prst="rect">
+            <a:avLst/>
+          </a:prstGeom>
+          <a:noFill/>
+          <a:ln/>
+        </p:spPr>
+        <p:txBody>
+          <a:bodyPr wrap="square" lIns="0" tIns="0" rIns="0" bIns="0" rtlCol="0" anchor="t"/>
+          <a:lstStyle/>
+          <a:p>
+            <a:pPr algn="l" indent="0" marL="0">
+              <a:lnSpc>
+                <a:spcPts val="1680"/>
+              </a:lnSpc>
+              <a:spcBef>
+                <a:spcPts val="300"/>
+              </a:spcBef>
+              <a:spcAft>
+                <a:spcPts val="300"/>
+              </a:spcAft>
+              <a:buNone/>
+            </a:pPr>
+            <a:r>
+              <a:rPr lang="en-US" sz="1200" dirty="0">
+                <a:solidFill>
+                  <a:srgbClr val="2C2C2C"/>
+                </a:solidFill>
+                <a:latin typeface="Verdana" pitchFamily="34" charset="0"/>
+                <a:ea typeface="Verdana" pitchFamily="34" charset="-122"/>
+                <a:cs typeface="Verdana" pitchFamily="34" charset="-120"/>
+              </a:rPr>
+              <a:t>Primary ·  · IKS Curriculum</a:t>
+            </a:r>
+            <a:endParaRPr lang="en-US" sz="1200" dirty="0"/>
+          </a:p>
+        </p:txBody>
+      </p:sp>
+    </p:spTree>
+  </p:cSld>
+  <p:clrMapOvr>
+    <a:masterClrMapping/>
+  </p:clrMapOvr>
+</p:sld>
+</file>
+
+<file path=ppt/slides/slide12.xml><?xml version="1.0" encoding="utf-8"?>
+<p:sld xmlns:a="http://schemas.openxmlformats.org/drawingml/2006/main" xmlns:r="http://schemas.openxmlformats.org/officeDocument/2006/relationships" xmlns:p="http://schemas.openxmlformats.org/presentationml/2006/main">
+  <p:cSld name="Slide 12">
+    <p:bg>
+      <p:bgPr>
+        <a:solidFill>
+          <a:srgbClr val="FAF7F2"/>
+        </a:solidFill>
+      </p:bgPr>
+    </p:bg>
+    <p:spTree>
+      <p:nvGrpSpPr>
+        <p:cNvPr id="1" name=""/>
+        <p:cNvGrpSpPr/>
+        <p:nvPr/>
+      </p:nvGrpSpPr>
+      <p:grpSpPr>
+        <a:xfrm>
+          <a:off x="0" y="0"/>
+          <a:ext cx="0" cy="0"/>
+          <a:chOff x="0" y="0"/>
+          <a:chExt cx="0" cy="0"/>
+        </a:xfrm>
+      </p:grpSpPr>
+      <p:sp>
+        <p:nvSpPr>
+          <p:cNvPr id="2" name="Text 0"/>
+          <p:cNvSpPr/>
+          <p:nvPr/>
+        </p:nvSpPr>
+        <p:spPr>
+          <a:xfrm>
+            <a:off x="0" y="0"/>
+            <a:ext cx="9144000" cy="101501"/>
+          </a:xfrm>
+          <a:prstGeom prst="rect">
+            <a:avLst/>
+          </a:prstGeom>
+          <a:solidFill>
+            <a:srgbClr val="87A96B"/>
+          </a:solidFill>
+          <a:ln/>
+        </p:spPr>
+        <p:txBody>
+          <a:bodyPr wrap="square" rtlCol="0" anchor="ctr"/>
+          <a:lstStyle/>
+          <a:p>
+            <a:pPr indent="0" marL="0">
+              <a:buNone/>
+            </a:pPr>
+            <a:endParaRPr lang="en-US" dirty="0"/>
+          </a:p>
+        </p:txBody>
+      </p:sp>
+      <p:sp>
+        <p:nvSpPr>
+          <p:cNvPr id="3" name="Text 1"/>
+          <p:cNvSpPr/>
+          <p:nvPr/>
+        </p:nvSpPr>
+        <p:spPr>
+          <a:xfrm>
+            <a:off x="406301" y="457051"/>
+            <a:ext cx="8498026" cy="274290"/>
+          </a:xfrm>
+          <a:prstGeom prst="rect">
+            <a:avLst/>
+          </a:prstGeom>
+          <a:noFill/>
+          <a:ln/>
+        </p:spPr>
+        <p:txBody>
+          <a:bodyPr wrap="square" lIns="0" tIns="0" rIns="0" bIns="0" rtlCol="0" anchor="t"/>
+          <a:lstStyle/>
+          <a:p>
+            <a:pPr algn="l" indent="0" marL="0">
+              <a:lnSpc>
+                <a:spcPts val="2160"/>
+              </a:lnSpc>
+              <a:spcBef>
+                <a:spcPts val="600"/>
+              </a:spcBef>
+              <a:spcAft>
+                <a:spcPts val="800"/>
+              </a:spcAft>
+              <a:buNone/>
+            </a:pPr>
+            <a:r>
+              <a:rPr lang="en-US" sz="1800" b="1" dirty="0">
+                <a:solidFill>
+                  <a:srgbClr val="E07A5F"/>
+                </a:solidFill>
+                <a:latin typeface="Georgia" pitchFamily="34" charset="0"/>
+                <a:ea typeface="Georgia" pitchFamily="34" charset="-122"/>
+                <a:cs typeface="Georgia" pitchFamily="34" charset="-120"/>
+              </a:rPr>
+              <a:t>Differentiation</a:t>
+            </a:r>
+            <a:endParaRPr lang="en-US" sz="1800" dirty="0"/>
+          </a:p>
+        </p:txBody>
+      </p:sp>
+      <p:sp>
+        <p:nvSpPr>
+          <p:cNvPr id="4" name="Text 2"/>
+          <p:cNvSpPr/>
+          <p:nvPr/>
+        </p:nvSpPr>
+        <p:spPr>
+          <a:xfrm>
+            <a:off x="634901" y="883593"/>
+            <a:ext cx="8102798" cy="525661"/>
+          </a:xfrm>
+          <a:prstGeom prst="rect">
+            <a:avLst/>
+          </a:prstGeom>
+          <a:noFill/>
+          <a:ln/>
+        </p:spPr>
+        <p:txBody>
+          <a:bodyPr wrap="square" lIns="0" tIns="0" rIns="0" bIns="0" rtlCol="0" anchor="t"/>
+          <a:lstStyle/>
+          <a:p>
+            <a:pPr algn="l" marL="342900" indent="-342900">
+              <a:lnSpc>
+                <a:spcPts val="1620"/>
+              </a:lnSpc>
+              <a:spcAft>
+                <a:spcPts val="300"/>
+              </a:spcAft>
+              <a:buSzPct val="100000"/>
+              <a:buChar char="•"/>
+            </a:pPr>
+            <a:r>
+              <a:rPr lang="en-US" sz="1200" b="1" dirty="0">
+                <a:solidFill>
+                  <a:srgbClr val="2C2C2C"/>
+                </a:solidFill>
+                <a:latin typeface="Verdana" pitchFamily="34" charset="0"/>
+                <a:ea typeface="Verdana" pitchFamily="34" charset="-122"/>
+                <a:cs typeface="Verdana" pitchFamily="34" charset="-120"/>
+              </a:rPr>
+              <a:t>Tier up:</a:t>
+            </a:r>
+            <a:pPr algn="l" indent="0" marL="0">
+              <a:lnSpc>
+                <a:spcPts val="1620"/>
+              </a:lnSpc>
+              <a:spcAft>
+                <a:spcPts val="300"/>
+              </a:spcAft>
+              <a:buNone/>
+            </a:pPr>
+            <a:r>
+              <a:rPr lang="en-US" sz="1200" dirty="0">
+                <a:solidFill>
+                  <a:srgbClr val="2C2C2C"/>
+                </a:solidFill>
+                <a:latin typeface="Verdana" pitchFamily="34" charset="0"/>
+                <a:ea typeface="Verdana" pitchFamily="34" charset="-122"/>
+                <a:cs typeface="Verdana" pitchFamily="34" charset="-120"/>
+              </a:rPr>
+              <a:t> Try the trick with carries (78 × 11 = 858).</a:t>
+            </a:r>
+            <a:endParaRPr lang="en-US" sz="1200" dirty="0"/>
+          </a:p>
+          <a:p>
+            <a:pPr algn="l" marL="342900" indent="-342900">
+              <a:lnSpc>
+                <a:spcPts val="1620"/>
+              </a:lnSpc>
+              <a:spcAft>
+                <a:spcPts val="300"/>
+              </a:spcAft>
+              <a:buSzPct val="100000"/>
+              <a:buChar char="•"/>
+            </a:pPr>
+            <a:r>
+              <a:rPr lang="en-US" sz="1200" b="1" dirty="0">
+                <a:solidFill>
+                  <a:srgbClr val="2C2C2C"/>
+                </a:solidFill>
+                <a:latin typeface="Verdana" pitchFamily="34" charset="0"/>
+                <a:ea typeface="Verdana" pitchFamily="34" charset="-122"/>
+                <a:cs typeface="Verdana" pitchFamily="34" charset="-120"/>
+              </a:rPr>
+              <a:t>Tier down:</a:t>
+            </a:r>
+            <a:pPr algn="l" indent="0" marL="0">
+              <a:lnSpc>
+                <a:spcPts val="1620"/>
+              </a:lnSpc>
+              <a:spcAft>
+                <a:spcPts val="300"/>
+              </a:spcAft>
+              <a:buNone/>
+            </a:pPr>
+            <a:r>
+              <a:rPr lang="en-US" sz="1200" dirty="0">
+                <a:solidFill>
+                  <a:srgbClr val="2C2C2C"/>
+                </a:solidFill>
+                <a:latin typeface="Verdana" pitchFamily="34" charset="0"/>
+                <a:ea typeface="Verdana" pitchFamily="34" charset="-122"/>
+                <a:cs typeface="Verdana" pitchFamily="34" charset="-120"/>
+              </a:rPr>
+              <a:t> Just remember: "multiplying by 11 has a quick trick."</a:t>
+            </a:r>
+            <a:endParaRPr lang="en-US" sz="1200" dirty="0"/>
+          </a:p>
+        </p:txBody>
+      </p:sp>
+      <p:sp>
+        <p:nvSpPr>
+          <p:cNvPr id="5" name="Text 3"/>
+          <p:cNvSpPr/>
+          <p:nvPr/>
+        </p:nvSpPr>
+        <p:spPr>
+          <a:xfrm>
+            <a:off x="406301" y="4434929"/>
+            <a:ext cx="8498026" cy="213271"/>
+          </a:xfrm>
+          <a:prstGeom prst="rect">
+            <a:avLst/>
+          </a:prstGeom>
+          <a:noFill/>
+          <a:ln/>
+        </p:spPr>
+        <p:txBody>
+          <a:bodyPr wrap="square" lIns="0" tIns="0" rIns="0" bIns="0" rtlCol="0" anchor="t"/>
+          <a:lstStyle/>
+          <a:p>
+            <a:pPr algn="l" indent="0" marL="0">
+              <a:lnSpc>
+                <a:spcPts val="1680"/>
+              </a:lnSpc>
+              <a:spcBef>
+                <a:spcPts val="300"/>
+              </a:spcBef>
+              <a:spcAft>
+                <a:spcPts val="300"/>
+              </a:spcAft>
+              <a:buNone/>
+            </a:pPr>
+            <a:r>
+              <a:rPr lang="en-US" sz="1200" dirty="0">
+                <a:solidFill>
+                  <a:srgbClr val="2C2C2C"/>
+                </a:solidFill>
+                <a:latin typeface="Verdana" pitchFamily="34" charset="0"/>
+                <a:ea typeface="Verdana" pitchFamily="34" charset="-122"/>
+                <a:cs typeface="Verdana" pitchFamily="34" charset="-120"/>
+              </a:rPr>
+              <a:t>Primary ·  · IKS Curriculum</a:t>
+            </a:r>
+            <a:endParaRPr lang="en-US" sz="1200" dirty="0"/>
+          </a:p>
+        </p:txBody>
+      </p:sp>
+    </p:spTree>
+  </p:cSld>
+  <p:clrMapOvr>
+    <a:masterClrMapping/>
+  </p:clrMapOvr>
+</p:sld>
+</file>
+
+<file path=ppt/slides/slide13.xml><?xml version="1.0" encoding="utf-8"?>
+<p:sld xmlns:a="http://schemas.openxmlformats.org/drawingml/2006/main" xmlns:r="http://schemas.openxmlformats.org/officeDocument/2006/relationships" xmlns:p="http://schemas.openxmlformats.org/presentationml/2006/main">
+  <p:cSld name="Slide 13">
+    <p:bg>
+      <p:bgPr>
+        <a:solidFill>
+          <a:srgbClr val="FAF7F2"/>
+        </a:solidFill>
+      </p:bgPr>
+    </p:bg>
+    <p:spTree>
+      <p:nvGrpSpPr>
+        <p:cNvPr id="1" name=""/>
+        <p:cNvGrpSpPr/>
+        <p:nvPr/>
+      </p:nvGrpSpPr>
+      <p:grpSpPr>
+        <a:xfrm>
+          <a:off x="0" y="0"/>
+          <a:ext cx="0" cy="0"/>
+          <a:chOff x="0" y="0"/>
+          <a:chExt cx="0" cy="0"/>
+        </a:xfrm>
+      </p:grpSpPr>
+      <p:sp>
+        <p:nvSpPr>
+          <p:cNvPr id="2" name="Text 0"/>
+          <p:cNvSpPr/>
+          <p:nvPr/>
+        </p:nvSpPr>
+        <p:spPr>
+          <a:xfrm>
+            <a:off x="0" y="0"/>
+            <a:ext cx="9144000" cy="101501"/>
+          </a:xfrm>
+          <a:prstGeom prst="rect">
+            <a:avLst/>
+          </a:prstGeom>
+          <a:solidFill>
+            <a:srgbClr val="87A96B"/>
+          </a:solidFill>
+          <a:ln/>
+        </p:spPr>
+        <p:txBody>
+          <a:bodyPr wrap="square" rtlCol="0" anchor="ctr"/>
+          <a:lstStyle/>
+          <a:p>
+            <a:pPr indent="0" marL="0">
+              <a:buNone/>
+            </a:pPr>
+            <a:endParaRPr lang="en-US" dirty="0"/>
+          </a:p>
+        </p:txBody>
+      </p:sp>
+      <p:sp>
+        <p:nvSpPr>
+          <p:cNvPr id="3" name="Text 1"/>
+          <p:cNvSpPr/>
+          <p:nvPr/>
+        </p:nvSpPr>
+        <p:spPr>
+          <a:xfrm>
+            <a:off x="406301" y="457051"/>
+            <a:ext cx="8498026" cy="274290"/>
+          </a:xfrm>
+          <a:prstGeom prst="rect">
+            <a:avLst/>
+          </a:prstGeom>
+          <a:noFill/>
+          <a:ln/>
+        </p:spPr>
+        <p:txBody>
+          <a:bodyPr wrap="square" lIns="0" tIns="0" rIns="0" bIns="0" rtlCol="0" anchor="t"/>
+          <a:lstStyle/>
+          <a:p>
+            <a:pPr algn="l" indent="0" marL="0">
+              <a:lnSpc>
+                <a:spcPts val="2160"/>
+              </a:lnSpc>
+              <a:spcBef>
+                <a:spcPts val="600"/>
+              </a:spcBef>
+              <a:spcAft>
+                <a:spcPts val="800"/>
+              </a:spcAft>
+              <a:buNone/>
+            </a:pPr>
+            <a:r>
+              <a:rPr lang="en-US" sz="1800" b="1" dirty="0">
+                <a:solidFill>
+                  <a:srgbClr val="E07A5F"/>
+                </a:solidFill>
+                <a:latin typeface="Georgia" pitchFamily="34" charset="0"/>
+                <a:ea typeface="Georgia" pitchFamily="34" charset="-122"/>
+                <a:cs typeface="Georgia" pitchFamily="34" charset="-120"/>
+              </a:rPr>
+              <a:t>Teacher notes</a:t>
+            </a:r>
+            <a:endParaRPr lang="en-US" sz="1800" dirty="0"/>
+          </a:p>
+        </p:txBody>
+      </p:sp>
+      <p:sp>
+        <p:nvSpPr>
+          <p:cNvPr id="4" name="Text 2"/>
+          <p:cNvSpPr/>
+          <p:nvPr/>
+        </p:nvSpPr>
+        <p:spPr>
+          <a:xfrm>
+            <a:off x="634901" y="883593"/>
+            <a:ext cx="8102798" cy="281880"/>
+          </a:xfrm>
+          <a:prstGeom prst="rect">
+            <a:avLst/>
+          </a:prstGeom>
+          <a:noFill/>
+          <a:ln/>
+        </p:spPr>
+        <p:txBody>
+          <a:bodyPr wrap="square" lIns="0" tIns="0" rIns="0" bIns="0" rtlCol="0" anchor="t"/>
+          <a:lstStyle/>
+          <a:p>
+            <a:pPr algn="l" marL="342900" indent="-342900">
+              <a:lnSpc>
+                <a:spcPts val="1620"/>
+              </a:lnSpc>
+              <a:spcAft>
+                <a:spcPts val="300"/>
+              </a:spcAft>
+              <a:buSzPct val="100000"/>
+              <a:buChar char="•"/>
+            </a:pPr>
+            <a:r>
+              <a:rPr lang="en-US" sz="1200" dirty="0">
+                <a:solidFill>
+                  <a:srgbClr val="2C2C2C"/>
+                </a:solidFill>
+                <a:latin typeface="Verdana" pitchFamily="34" charset="0"/>
+                <a:ea typeface="Verdana" pitchFamily="34" charset="-122"/>
+                <a:cs typeface="Verdana" pitchFamily="34" charset="-120"/>
+              </a:rPr>
+              <a:t>Module 5 is the full Vedic Math module (the dot method). Today is a different trick to keep things fresh.</a:t>
             </a:r>
             <a:endParaRPr lang="en-US" sz="1200" dirty="0"/>
           </a:p>
@@ -2322,7 +3121,7 @@
                 <a:ea typeface="Georgia" pitchFamily="34" charset="-122"/>
                 <a:cs typeface="Georgia" pitchFamily="34" charset="-120"/>
               </a:rPr>
-              <a:t>Materials</a:t>
+              <a:t>Goal</a:t>
             </a:r>
             <a:endParaRPr lang="en-US" sz="1800" dirty="0"/>
           </a:p>
@@ -2370,7 +3169,7 @@
                 <a:ea typeface="Verdana" pitchFamily="34" charset="-122"/>
                 <a:cs typeface="Verdana" pitchFamily="34" charset="-120"/>
               </a:rPr>
-              <a:t>– Whiteboard</a:t>
+              <a:t>Children hear a story about Indian mathematicians and try one fast trick.</a:t>
             </a:r>
             <a:endParaRPr lang="en-US" sz="1200" dirty="0"/>
           </a:p>
@@ -2528,7 +3327,7 @@
                 <a:ea typeface="Georgia" pitchFamily="34" charset="-122"/>
                 <a:cs typeface="Georgia" pitchFamily="34" charset="-120"/>
               </a:rPr>
-              <a:t>Flow</a:t>
+              <a:t>Materials</a:t>
             </a:r>
             <a:endParaRPr lang="en-US" sz="1800" dirty="0"/>
           </a:p>
@@ -2537,6 +3336,52 @@
       <p:sp>
         <p:nvSpPr>
           <p:cNvPr id="4" name="Text 2"/>
+          <p:cNvSpPr/>
+          <p:nvPr/>
+        </p:nvSpPr>
+        <p:spPr>
+          <a:xfrm>
+            <a:off x="634901" y="883593"/>
+            <a:ext cx="8102798" cy="281880"/>
+          </a:xfrm>
+          <a:prstGeom prst="rect">
+            <a:avLst/>
+          </a:prstGeom>
+          <a:noFill/>
+          <a:ln/>
+        </p:spPr>
+        <p:txBody>
+          <a:bodyPr wrap="square" lIns="0" tIns="0" rIns="0" bIns="0" rtlCol="0" anchor="t"/>
+          <a:lstStyle/>
+          <a:p>
+            <a:pPr algn="l" marL="342900" indent="-342900">
+              <a:lnSpc>
+                <a:spcPts val="1620"/>
+              </a:lnSpc>
+              <a:spcAft>
+                <a:spcPts val="300"/>
+              </a:spcAft>
+              <a:buSzPct val="100000"/>
+              <a:buChar char="•"/>
+            </a:pPr>
+            <a:r>
+              <a:rPr lang="en-US" sz="1200" dirty="0">
+                <a:solidFill>
+                  <a:srgbClr val="2C2C2C"/>
+                </a:solidFill>
+                <a:latin typeface="Verdana" pitchFamily="34" charset="0"/>
+                <a:ea typeface="Verdana" pitchFamily="34" charset="-122"/>
+                <a:cs typeface="Verdana" pitchFamily="34" charset="-120"/>
+              </a:rPr>
+              <a:t>Whiteboard</a:t>
+            </a:r>
+            <a:endParaRPr lang="en-US" sz="1200" dirty="0"/>
+          </a:p>
+        </p:txBody>
+      </p:sp>
+      <p:sp>
+        <p:nvSpPr>
+          <p:cNvPr id="5" name="Text 3"/>
           <p:cNvSpPr/>
           <p:nvPr/>
         </p:nvSpPr>
@@ -2686,7 +3531,7 @@
                 <a:ea typeface="Georgia" pitchFamily="34" charset="-122"/>
                 <a:cs typeface="Georgia" pitchFamily="34" charset="-120"/>
               </a:rPr>
-              <a:t>Settle + chant + song (5 min)</a:t>
+              <a:t>Flow</a:t>
             </a:r>
             <a:endParaRPr lang="en-US" sz="1800" dirty="0"/>
           </a:p>
@@ -2844,7 +3689,7 @@
                 <a:ea typeface="Georgia" pitchFamily="34" charset="-122"/>
                 <a:cs typeface="Georgia" pitchFamily="34" charset="-120"/>
               </a:rPr>
-              <a:t>Story (10 min)</a:t>
+              <a:t>Settle + chant + song (5 min)</a:t>
             </a:r>
             <a:endParaRPr lang="en-US" sz="1800" dirty="0"/>
           </a:p>
@@ -2853,299 +3698,6 @@
       <p:sp>
         <p:nvSpPr>
           <p:cNvPr id="4" name="Text 2"/>
-          <p:cNvSpPr/>
-          <p:nvPr/>
-        </p:nvSpPr>
-        <p:spPr>
-          <a:xfrm>
-            <a:off x="406301" y="870942"/>
-            <a:ext cx="8498026" cy="426541"/>
-          </a:xfrm>
-          <a:prstGeom prst="rect">
-            <a:avLst/>
-          </a:prstGeom>
-          <a:noFill/>
-          <a:ln/>
-        </p:spPr>
-        <p:txBody>
-          <a:bodyPr wrap="square" lIns="0" tIns="0" rIns="0" bIns="0" rtlCol="0" anchor="t"/>
-          <a:lstStyle/>
-          <a:p>
-            <a:pPr algn="l" indent="0" marL="0">
-              <a:lnSpc>
-                <a:spcPts val="1680"/>
-              </a:lnSpc>
-              <a:spcBef>
-                <a:spcPts val="300"/>
-              </a:spcBef>
-              <a:spcAft>
-                <a:spcPts val="300"/>
-              </a:spcAft>
-              <a:buNone/>
-            </a:pPr>
-            <a:r>
-              <a:rPr lang="en-US" sz="1200" i="1" dirty="0">
-                <a:solidFill>
-                  <a:srgbClr val="2C2C2C"/>
-                </a:solidFill>
-                <a:latin typeface="Verdana" pitchFamily="34" charset="0"/>
-                <a:ea typeface="Verdana" pitchFamily="34" charset="-122"/>
-                <a:cs typeface="Verdana" pitchFamily="34" charset="-120"/>
-              </a:rPr>
-              <a:t>"In old India, there were mathematicians who could do amazing tricks with numbers in their HEAD. No paper. No calculator. Just their mind."</a:t>
-            </a:r>
-            <a:endParaRPr lang="en-US" sz="1200" dirty="0"/>
-          </a:p>
-        </p:txBody>
-      </p:sp>
-      <p:sp>
-        <p:nvSpPr>
-          <p:cNvPr id="5" name="Text 3"/>
-          <p:cNvSpPr/>
-          <p:nvPr/>
-        </p:nvSpPr>
-        <p:spPr>
-          <a:xfrm>
-            <a:off x="406301" y="1373684"/>
-            <a:ext cx="8498026" cy="426541"/>
-          </a:xfrm>
-          <a:prstGeom prst="rect">
-            <a:avLst/>
-          </a:prstGeom>
-          <a:noFill/>
-          <a:ln/>
-        </p:spPr>
-        <p:txBody>
-          <a:bodyPr wrap="square" lIns="0" tIns="0" rIns="0" bIns="0" rtlCol="0" anchor="t"/>
-          <a:lstStyle/>
-          <a:p>
-            <a:pPr algn="l" indent="0" marL="0">
-              <a:lnSpc>
-                <a:spcPts val="1680"/>
-              </a:lnSpc>
-              <a:spcBef>
-                <a:spcPts val="300"/>
-              </a:spcBef>
-              <a:spcAft>
-                <a:spcPts val="300"/>
-              </a:spcAft>
-              <a:buNone/>
-            </a:pPr>
-            <a:r>
-              <a:rPr lang="en-US" sz="1200" i="1" dirty="0">
-                <a:solidFill>
-                  <a:srgbClr val="2C2C2C"/>
-                </a:solidFill>
-                <a:latin typeface="Verdana" pitchFamily="34" charset="0"/>
-                <a:ea typeface="Verdana" pitchFamily="34" charset="-122"/>
-                <a:cs typeface="Verdana" pitchFamily="34" charset="-120"/>
-              </a:rPr>
-              <a:t>"One of them was a man named Bhāskara who lived about 900 years ago. He wrote a math book — but he wrote it for his DAUGHTER! Her name was Līlāvatī. He filled the book with little puzzles and stories."</a:t>
-            </a:r>
-            <a:endParaRPr lang="en-US" sz="1200" dirty="0"/>
-          </a:p>
-        </p:txBody>
-      </p:sp>
-      <p:sp>
-        <p:nvSpPr>
-          <p:cNvPr id="6" name="Text 4"/>
-          <p:cNvSpPr/>
-          <p:nvPr/>
-        </p:nvSpPr>
-        <p:spPr>
-          <a:xfrm>
-            <a:off x="406301" y="1876425"/>
-            <a:ext cx="8498026" cy="213271"/>
-          </a:xfrm>
-          <a:prstGeom prst="rect">
-            <a:avLst/>
-          </a:prstGeom>
-          <a:noFill/>
-          <a:ln/>
-        </p:spPr>
-        <p:txBody>
-          <a:bodyPr wrap="square" lIns="0" tIns="0" rIns="0" bIns="0" rtlCol="0" anchor="t"/>
-          <a:lstStyle/>
-          <a:p>
-            <a:pPr algn="l" indent="0" marL="0">
-              <a:lnSpc>
-                <a:spcPts val="1680"/>
-              </a:lnSpc>
-              <a:spcBef>
-                <a:spcPts val="300"/>
-              </a:spcBef>
-              <a:spcAft>
-                <a:spcPts val="300"/>
-              </a:spcAft>
-              <a:buNone/>
-            </a:pPr>
-            <a:r>
-              <a:rPr lang="en-US" sz="1200" i="1" dirty="0">
-                <a:solidFill>
-                  <a:srgbClr val="2C2C2C"/>
-                </a:solidFill>
-                <a:latin typeface="Verdana" pitchFamily="34" charset="0"/>
-                <a:ea typeface="Verdana" pitchFamily="34" charset="-122"/>
-                <a:cs typeface="Verdana" pitchFamily="34" charset="-120"/>
-              </a:rPr>
-              <a:t>"Here's one of Bhāskara's puzzles in modern words:"</a:t>
-            </a:r>
-            <a:endParaRPr lang="en-US" sz="1200" dirty="0"/>
-          </a:p>
-        </p:txBody>
-      </p:sp>
-      <p:sp>
-        <p:nvSpPr>
-          <p:cNvPr id="7" name="Text 5"/>
-          <p:cNvSpPr/>
-          <p:nvPr/>
-        </p:nvSpPr>
-        <p:spPr>
-          <a:xfrm>
-            <a:off x="406301" y="2178546"/>
-            <a:ext cx="8331398" cy="842963"/>
-          </a:xfrm>
-          <a:prstGeom prst="rect">
-            <a:avLst/>
-          </a:prstGeom>
-          <a:solidFill>
-            <a:srgbClr val="FFFFFF"/>
-          </a:solidFill>
-          <a:ln/>
-        </p:spPr>
-        <p:txBody>
-          <a:bodyPr wrap="square" rtlCol="0" anchor="ctr"/>
-          <a:lstStyle/>
-          <a:p>
-            <a:pPr indent="0" marL="0">
-              <a:buNone/>
-            </a:pPr>
-            <a:endParaRPr lang="en-US" dirty="0"/>
-          </a:p>
-        </p:txBody>
-      </p:sp>
-      <p:sp>
-        <p:nvSpPr>
-          <p:cNvPr id="8" name="Shape 6"/>
-          <p:cNvSpPr/>
-          <p:nvPr/>
-        </p:nvSpPr>
-        <p:spPr>
-          <a:xfrm>
-            <a:off x="434876" y="2178546"/>
-            <a:ext cx="0" cy="842963"/>
-          </a:xfrm>
-          <a:prstGeom prst="line">
-            <a:avLst/>
-          </a:prstGeom>
-          <a:noFill/>
-          <a:ln w="57150">
-            <a:solidFill>
-              <a:srgbClr val="E07A5F"/>
-            </a:solidFill>
-            <a:prstDash val="solid"/>
-          </a:ln>
-        </p:spPr>
-      </p:sp>
-      <p:sp>
-        <p:nvSpPr>
-          <p:cNvPr id="9" name="Text 7"/>
-          <p:cNvSpPr/>
-          <p:nvPr/>
-        </p:nvSpPr>
-        <p:spPr>
-          <a:xfrm>
-            <a:off x="692051" y="2369046"/>
-            <a:ext cx="7973389" cy="461963"/>
-          </a:xfrm>
-          <a:prstGeom prst="rect">
-            <a:avLst/>
-          </a:prstGeom>
-          <a:noFill/>
-          <a:ln/>
-        </p:spPr>
-        <p:txBody>
-          <a:bodyPr wrap="square" lIns="0" tIns="0" rIns="0" bIns="0" rtlCol="0" anchor="t"/>
-          <a:lstStyle/>
-          <a:p>
-            <a:pPr algn="l" indent="0" marL="0">
-              <a:lnSpc>
-                <a:spcPts val="1820"/>
-              </a:lnSpc>
-              <a:spcBef>
-                <a:spcPts val="300"/>
-              </a:spcBef>
-              <a:spcAft>
-                <a:spcPts val="300"/>
-              </a:spcAft>
-              <a:buNone/>
-            </a:pPr>
-            <a:r>
-              <a:rPr lang="en-US" sz="1300" i="1" dirty="0">
-                <a:solidFill>
-                  <a:srgbClr val="2C2C2C"/>
-                </a:solidFill>
-                <a:latin typeface="Georgia" pitchFamily="34" charset="0"/>
-                <a:ea typeface="Georgia" pitchFamily="34" charset="-122"/>
-                <a:cs typeface="Georgia" pitchFamily="34" charset="-120"/>
-              </a:rPr>
-              <a:t>A flock of 24 swans flew over a lake. 12 dived in to swim, 6 flew east, and the rest flew to the west. How many flew west?</a:t>
-            </a:r>
-            <a:endParaRPr lang="en-US" sz="1300" dirty="0"/>
-          </a:p>
-        </p:txBody>
-      </p:sp>
-      <p:sp>
-        <p:nvSpPr>
-          <p:cNvPr id="10" name="Text 8"/>
-          <p:cNvSpPr/>
-          <p:nvPr/>
-        </p:nvSpPr>
-        <p:spPr>
-          <a:xfrm>
-            <a:off x="406301" y="3110359"/>
-            <a:ext cx="8498026" cy="213271"/>
-          </a:xfrm>
-          <a:prstGeom prst="rect">
-            <a:avLst/>
-          </a:prstGeom>
-          <a:noFill/>
-          <a:ln/>
-        </p:spPr>
-        <p:txBody>
-          <a:bodyPr wrap="square" lIns="0" tIns="0" rIns="0" bIns="0" rtlCol="0" anchor="t"/>
-          <a:lstStyle/>
-          <a:p>
-            <a:pPr algn="l" indent="0" marL="0">
-              <a:lnSpc>
-                <a:spcPts val="1680"/>
-              </a:lnSpc>
-              <a:spcBef>
-                <a:spcPts val="300"/>
-              </a:spcBef>
-              <a:spcAft>
-                <a:spcPts val="300"/>
-              </a:spcAft>
-              <a:buNone/>
-            </a:pPr>
-            <a:r>
-              <a:rPr lang="en-US" sz="1200" dirty="0">
-                <a:solidFill>
-                  <a:srgbClr val="2C2C2C"/>
-                </a:solidFill>
-                <a:latin typeface="Verdana" pitchFamily="34" charset="0"/>
-                <a:ea typeface="Verdana" pitchFamily="34" charset="-122"/>
-                <a:cs typeface="Verdana" pitchFamily="34" charset="-120"/>
-              </a:rPr>
-              <a:t>(Answer: 24 − 12 − 6 = 6)</a:t>
-            </a:r>
-            <a:endParaRPr lang="en-US" sz="1200" dirty="0"/>
-          </a:p>
-        </p:txBody>
-      </p:sp>
-      <p:sp>
-        <p:nvSpPr>
-          <p:cNvPr id="11" name="Text 9"/>
           <p:cNvSpPr/>
           <p:nvPr/>
         </p:nvSpPr>
@@ -3295,7 +3847,7 @@
                 <a:ea typeface="Georgia" pitchFamily="34" charset="-122"/>
                 <a:cs typeface="Georgia" pitchFamily="34" charset="-120"/>
               </a:rPr>
-              <a:t>Try a fast trick (12 min)</a:t>
+              <a:t>Story (10 min)</a:t>
             </a:r>
             <a:endParaRPr lang="en-US" sz="1800" dirty="0"/>
           </a:p>
@@ -3310,7 +3862,7 @@
         <p:spPr>
           <a:xfrm>
             <a:off x="406301" y="870942"/>
-            <a:ext cx="8498026" cy="213271"/>
+            <a:ext cx="8498026" cy="426541"/>
           </a:xfrm>
           <a:prstGeom prst="rect">
             <a:avLst/>
@@ -3335,7 +3887,7 @@
               <a:buNone/>
             </a:pPr>
             <a:r>
-              <a:rPr lang="en-US" sz="1200" dirty="0">
+              <a:rPr lang="en-US" sz="1200" i="1" dirty="0">
                 <a:solidFill>
                   <a:srgbClr val="2C2C2C"/>
                 </a:solidFill>
@@ -3343,8 +3895,33 @@
                 <a:ea typeface="Verdana" pitchFamily="34" charset="-122"/>
                 <a:cs typeface="Verdana" pitchFamily="34" charset="-120"/>
               </a:rPr>
-              <a:t>Teach: </a:t>
-            </a:r>
+              <a:t>"In old India, there were mathematicians who could do amazing tricks with numbers in their HEAD. No paper. No calculator. Just their mind."</a:t>
+            </a:r>
+            <a:endParaRPr lang="en-US" sz="1200" dirty="0"/>
+          </a:p>
+        </p:txBody>
+      </p:sp>
+      <p:sp>
+        <p:nvSpPr>
+          <p:cNvPr id="5" name="Text 3"/>
+          <p:cNvSpPr/>
+          <p:nvPr/>
+        </p:nvSpPr>
+        <p:spPr>
+          <a:xfrm>
+            <a:off x="406301" y="1373684"/>
+            <a:ext cx="8498026" cy="426541"/>
+          </a:xfrm>
+          <a:prstGeom prst="rect">
+            <a:avLst/>
+          </a:prstGeom>
+          <a:noFill/>
+          <a:ln/>
+        </p:spPr>
+        <p:txBody>
+          <a:bodyPr wrap="square" lIns="0" tIns="0" rIns="0" bIns="0" rtlCol="0" anchor="t"/>
+          <a:lstStyle/>
+          <a:p>
             <a:pPr algn="l" indent="0" marL="0">
               <a:lnSpc>
                 <a:spcPts val="1680"/>
@@ -3358,7 +3935,7 @@
               <a:buNone/>
             </a:pPr>
             <a:r>
-              <a:rPr lang="en-US" sz="1200" b="1" dirty="0">
+              <a:rPr lang="en-US" sz="1200" i="1" dirty="0">
                 <a:solidFill>
                   <a:srgbClr val="2C2C2C"/>
                 </a:solidFill>
@@ -3366,7 +3943,7 @@
                 <a:ea typeface="Verdana" pitchFamily="34" charset="-122"/>
                 <a:cs typeface="Verdana" pitchFamily="34" charset="-120"/>
               </a:rPr>
-              <a:t>Multiplying by 11.</a:t>
+              <a:t>"One of them was a man named Bhāskara who lived about 900 years ago. He wrote a math book — but he wrote it for his DAUGHTER! Her name was Līlāvatī. He filled the book with little puzzles and stories."</a:t>
             </a:r>
             <a:endParaRPr lang="en-US" sz="1200" dirty="0"/>
           </a:p>
@@ -3374,14 +3951,14 @@
       </p:sp>
       <p:sp>
         <p:nvSpPr>
-          <p:cNvPr id="5" name="Text 3"/>
-          <p:cNvSpPr/>
-          <p:nvPr/>
-        </p:nvSpPr>
-        <p:spPr>
-          <a:xfrm>
-            <a:off x="406301" y="1160413"/>
-            <a:ext cx="8498026" cy="426541"/>
+          <p:cNvPr id="6" name="Text 4"/>
+          <p:cNvSpPr/>
+          <p:nvPr/>
+        </p:nvSpPr>
+        <p:spPr>
+          <a:xfrm>
+            <a:off x="406301" y="1876425"/>
+            <a:ext cx="8498026" cy="213271"/>
           </a:xfrm>
           <a:prstGeom prst="rect">
             <a:avLst/>
@@ -3406,7 +3983,7 @@
               <a:buNone/>
             </a:pPr>
             <a:r>
-              <a:rPr lang="en-US" sz="1200" dirty="0">
+              <a:rPr lang="en-US" sz="1200" i="1" dirty="0">
                 <a:solidFill>
                   <a:srgbClr val="2C2C2C"/>
                 </a:solidFill>
@@ -3414,145 +3991,7 @@
                 <a:ea typeface="Verdana" pitchFamily="34" charset="-122"/>
                 <a:cs typeface="Verdana" pitchFamily="34" charset="-120"/>
               </a:rPr>
-              <a:t>Take any 2-digit number: </a:t>
-            </a:r>
-            <a:pPr algn="l" indent="0" marL="0">
-              <a:lnSpc>
-                <a:spcPts val="1680"/>
-              </a:lnSpc>
-              <a:spcBef>
-                <a:spcPts val="300"/>
-              </a:spcBef>
-              <a:spcAft>
-                <a:spcPts val="300"/>
-              </a:spcAft>
-              <a:buNone/>
-            </a:pPr>
-            <a:r>
-              <a:rPr lang="en-US" sz="1200" b="1" dirty="0">
-                <a:solidFill>
-                  <a:srgbClr val="2C2C2C"/>
-                </a:solidFill>
-                <a:latin typeface="Verdana" pitchFamily="34" charset="0"/>
-                <a:ea typeface="Verdana" pitchFamily="34" charset="-122"/>
-                <a:cs typeface="Verdana" pitchFamily="34" charset="-120"/>
-              </a:rPr>
-              <a:t>23.</a:t>
-            </a:r>
-            <a:pPr algn="l" indent="0" marL="0">
-              <a:lnSpc>
-                <a:spcPts val="1680"/>
-              </a:lnSpc>
-              <a:spcBef>
-                <a:spcPts val="300"/>
-              </a:spcBef>
-              <a:spcAft>
-                <a:spcPts val="300"/>
-              </a:spcAft>
-              <a:buNone/>
-            </a:pPr>
-            <a:r>
-              <a:rPr lang="en-US" sz="1200" dirty="0">
-                <a:solidFill>
-                  <a:srgbClr val="2C2C2C"/>
-                </a:solidFill>
-                <a:latin typeface="Verdana" pitchFamily="34" charset="0"/>
-                <a:ea typeface="Verdana" pitchFamily="34" charset="-122"/>
-                <a:cs typeface="Verdana" pitchFamily="34" charset="-120"/>
-              </a:rPr>
-              <a:t> – Split: 2 _ 3 – Add the digits: 2+3 = 5 – Put the sum in the middle: </a:t>
-            </a:r>
-            <a:pPr algn="l" indent="0" marL="0">
-              <a:lnSpc>
-                <a:spcPts val="1680"/>
-              </a:lnSpc>
-              <a:spcBef>
-                <a:spcPts val="300"/>
-              </a:spcBef>
-              <a:spcAft>
-                <a:spcPts val="300"/>
-              </a:spcAft>
-              <a:buNone/>
-            </a:pPr>
-            <a:r>
-              <a:rPr lang="en-US" sz="1200" b="1" dirty="0">
-                <a:solidFill>
-                  <a:srgbClr val="2C2C2C"/>
-                </a:solidFill>
-                <a:latin typeface="Verdana" pitchFamily="34" charset="0"/>
-                <a:ea typeface="Verdana" pitchFamily="34" charset="-122"/>
-                <a:cs typeface="Verdana" pitchFamily="34" charset="-120"/>
-              </a:rPr>
-              <a:t>253</a:t>
-            </a:r>
-            <a:pPr algn="l" indent="0" marL="0">
-              <a:lnSpc>
-                <a:spcPts val="1680"/>
-              </a:lnSpc>
-              <a:spcBef>
-                <a:spcPts val="300"/>
-              </a:spcBef>
-              <a:spcAft>
-                <a:spcPts val="300"/>
-              </a:spcAft>
-              <a:buNone/>
-            </a:pPr>
-            <a:r>
-              <a:rPr lang="en-US" sz="1200" dirty="0">
-                <a:solidFill>
-                  <a:srgbClr val="2C2C2C"/>
-                </a:solidFill>
-                <a:latin typeface="Verdana" pitchFamily="34" charset="0"/>
-                <a:ea typeface="Verdana" pitchFamily="34" charset="-122"/>
-                <a:cs typeface="Verdana" pitchFamily="34" charset="-120"/>
-              </a:rPr>
-              <a:t> – So 23 × 11 = </a:t>
-            </a:r>
-            <a:pPr algn="l" indent="0" marL="0">
-              <a:lnSpc>
-                <a:spcPts val="1680"/>
-              </a:lnSpc>
-              <a:spcBef>
-                <a:spcPts val="300"/>
-              </a:spcBef>
-              <a:spcAft>
-                <a:spcPts val="300"/>
-              </a:spcAft>
-              <a:buNone/>
-            </a:pPr>
-            <a:r>
-              <a:rPr lang="en-US" sz="1200" b="1" dirty="0">
-                <a:solidFill>
-                  <a:srgbClr val="2C2C2C"/>
-                </a:solidFill>
-                <a:latin typeface="Verdana" pitchFamily="34" charset="0"/>
-                <a:ea typeface="Verdana" pitchFamily="34" charset="-122"/>
-                <a:cs typeface="Verdana" pitchFamily="34" charset="-120"/>
-              </a:rPr>
-              <a:t>253</a:t>
-            </a:r>
-            <a:pPr algn="l" indent="0" marL="0">
-              <a:lnSpc>
-                <a:spcPts val="1680"/>
-              </a:lnSpc>
-              <a:spcBef>
-                <a:spcPts val="300"/>
-              </a:spcBef>
-              <a:spcAft>
-                <a:spcPts val="300"/>
-              </a:spcAft>
-              <a:buNone/>
-            </a:pPr>
-            <a:r>
-              <a:rPr lang="en-US" sz="1200" dirty="0">
-                <a:solidFill>
-                  <a:srgbClr val="2C2C2C"/>
-                </a:solidFill>
-                <a:latin typeface="Verdana" pitchFamily="34" charset="0"/>
-                <a:ea typeface="Verdana" pitchFamily="34" charset="-122"/>
-                <a:cs typeface="Verdana" pitchFamily="34" charset="-120"/>
-              </a:rPr>
-              <a:t>!</a:t>
+              <a:t>"Here's one of Bhāskara's puzzles in modern words:"</a:t>
             </a:r>
             <a:endParaRPr lang="en-US" sz="1200" dirty="0"/>
           </a:p>
@@ -3560,103 +3999,7 @@
       </p:sp>
       <p:sp>
         <p:nvSpPr>
-          <p:cNvPr id="6" name="Text 4"/>
-          <p:cNvSpPr/>
-          <p:nvPr/>
-        </p:nvSpPr>
-        <p:spPr>
-          <a:xfrm>
-            <a:off x="406301" y="1663154"/>
-            <a:ext cx="8498026" cy="213271"/>
-          </a:xfrm>
-          <a:prstGeom prst="rect">
-            <a:avLst/>
-          </a:prstGeom>
-          <a:noFill/>
-          <a:ln/>
-        </p:spPr>
-        <p:txBody>
-          <a:bodyPr wrap="square" lIns="0" tIns="0" rIns="0" bIns="0" rtlCol="0" anchor="t"/>
-          <a:lstStyle/>
-          <a:p>
-            <a:pPr algn="l" indent="0" marL="0">
-              <a:lnSpc>
-                <a:spcPts val="1680"/>
-              </a:lnSpc>
-              <a:spcBef>
-                <a:spcPts val="300"/>
-              </a:spcBef>
-              <a:spcAft>
-                <a:spcPts val="300"/>
-              </a:spcAft>
-              <a:buNone/>
-            </a:pPr>
-            <a:r>
-              <a:rPr lang="en-US" sz="1200" dirty="0">
-                <a:solidFill>
-                  <a:srgbClr val="2C2C2C"/>
-                </a:solidFill>
-                <a:latin typeface="Verdana" pitchFamily="34" charset="0"/>
-                <a:ea typeface="Verdana" pitchFamily="34" charset="-122"/>
-                <a:cs typeface="Verdana" pitchFamily="34" charset="-120"/>
-              </a:rPr>
-              <a:t>Try together: 41 × 11? 52 × 11? 63 × 11?</a:t>
-            </a:r>
-            <a:endParaRPr lang="en-US" sz="1200" dirty="0"/>
-          </a:p>
-        </p:txBody>
-      </p:sp>
-      <p:sp>
-        <p:nvSpPr>
           <p:cNvPr id="7" name="Text 5"/>
-          <p:cNvSpPr/>
-          <p:nvPr/>
-        </p:nvSpPr>
-        <p:spPr>
-          <a:xfrm>
-            <a:off x="406301" y="1952625"/>
-            <a:ext cx="8498026" cy="213271"/>
-          </a:xfrm>
-          <a:prstGeom prst="rect">
-            <a:avLst/>
-          </a:prstGeom>
-          <a:noFill/>
-          <a:ln/>
-        </p:spPr>
-        <p:txBody>
-          <a:bodyPr wrap="square" lIns="0" tIns="0" rIns="0" bIns="0" rtlCol="0" anchor="t"/>
-          <a:lstStyle/>
-          <a:p>
-            <a:pPr algn="l" indent="0" marL="0">
-              <a:lnSpc>
-                <a:spcPts val="1680"/>
-              </a:lnSpc>
-              <a:spcBef>
-                <a:spcPts val="300"/>
-              </a:spcBef>
-              <a:spcAft>
-                <a:spcPts val="300"/>
-              </a:spcAft>
-              <a:buNone/>
-            </a:pPr>
-            <a:r>
-              <a:rPr lang="en-US" sz="1200" dirty="0">
-                <a:solidFill>
-                  <a:srgbClr val="2C2C2C"/>
-                </a:solidFill>
-                <a:latin typeface="Verdana" pitchFamily="34" charset="0"/>
-                <a:ea typeface="Verdana" pitchFamily="34" charset="-122"/>
-                <a:cs typeface="Verdana" pitchFamily="34" charset="-120"/>
-              </a:rPr>
-              <a:t>(For carries — 78 × 11 = 7(7+8)8 = 7(15)8 = 858 — slightly trickier, skip if too hard.)</a:t>
-            </a:r>
-            <a:endParaRPr lang="en-US" sz="1200" dirty="0"/>
-          </a:p>
-        </p:txBody>
-      </p:sp>
-      <p:sp>
-        <p:nvSpPr>
-          <p:cNvPr id="8" name="Text 6"/>
           <p:cNvSpPr/>
           <p:nvPr/>
         </p:nvSpPr>
@@ -3806,7 +4149,7 @@
                 <a:ea typeface="Georgia" pitchFamily="34" charset="-122"/>
                 <a:cs typeface="Georgia" pitchFamily="34" charset="-120"/>
               </a:rPr>
-              <a:t>Show + chant (3 min)</a:t>
+              <a:t>Story (10 min) (cont.)</a:t>
             </a:r>
             <a:endParaRPr lang="en-US" sz="1800" dirty="0"/>
           </a:p>
@@ -3815,6 +4158,155 @@
       <p:sp>
         <p:nvSpPr>
           <p:cNvPr id="4" name="Text 2"/>
+          <p:cNvSpPr/>
+          <p:nvPr/>
+        </p:nvSpPr>
+        <p:spPr>
+          <a:xfrm>
+            <a:off x="406301" y="883593"/>
+            <a:ext cx="8331398" cy="842963"/>
+          </a:xfrm>
+          <a:prstGeom prst="rect">
+            <a:avLst/>
+          </a:prstGeom>
+          <a:solidFill>
+            <a:srgbClr val="FFFFFF"/>
+          </a:solidFill>
+          <a:ln/>
+        </p:spPr>
+        <p:txBody>
+          <a:bodyPr wrap="square" rtlCol="0" anchor="ctr"/>
+          <a:lstStyle/>
+          <a:p>
+            <a:pPr indent="0" marL="0">
+              <a:buNone/>
+            </a:pPr>
+            <a:endParaRPr lang="en-US" dirty="0"/>
+          </a:p>
+        </p:txBody>
+      </p:sp>
+      <p:sp>
+        <p:nvSpPr>
+          <p:cNvPr id="5" name="Shape 3"/>
+          <p:cNvSpPr/>
+          <p:nvPr/>
+        </p:nvSpPr>
+        <p:spPr>
+          <a:xfrm>
+            <a:off x="434876" y="883593"/>
+            <a:ext cx="0" cy="842963"/>
+          </a:xfrm>
+          <a:prstGeom prst="line">
+            <a:avLst/>
+          </a:prstGeom>
+          <a:noFill/>
+          <a:ln w="57150">
+            <a:solidFill>
+              <a:srgbClr val="E07A5F"/>
+            </a:solidFill>
+            <a:prstDash val="solid"/>
+          </a:ln>
+        </p:spPr>
+      </p:sp>
+      <p:sp>
+        <p:nvSpPr>
+          <p:cNvPr id="6" name="Text 4"/>
+          <p:cNvSpPr/>
+          <p:nvPr/>
+        </p:nvSpPr>
+        <p:spPr>
+          <a:xfrm>
+            <a:off x="692051" y="1074093"/>
+            <a:ext cx="7973389" cy="461963"/>
+          </a:xfrm>
+          <a:prstGeom prst="rect">
+            <a:avLst/>
+          </a:prstGeom>
+          <a:noFill/>
+          <a:ln/>
+        </p:spPr>
+        <p:txBody>
+          <a:bodyPr wrap="square" lIns="0" tIns="0" rIns="0" bIns="0" rtlCol="0" anchor="t"/>
+          <a:lstStyle/>
+          <a:p>
+            <a:pPr algn="l" indent="0" marL="0">
+              <a:lnSpc>
+                <a:spcPts val="1820"/>
+              </a:lnSpc>
+              <a:spcBef>
+                <a:spcPts val="300"/>
+              </a:spcBef>
+              <a:spcAft>
+                <a:spcPts val="300"/>
+              </a:spcAft>
+              <a:buNone/>
+            </a:pPr>
+            <a:r>
+              <a:rPr lang="en-US" sz="1300" i="1" dirty="0">
+                <a:solidFill>
+                  <a:srgbClr val="2C2C2C"/>
+                </a:solidFill>
+                <a:latin typeface="Georgia" pitchFamily="34" charset="0"/>
+                <a:ea typeface="Georgia" pitchFamily="34" charset="-122"/>
+                <a:cs typeface="Georgia" pitchFamily="34" charset="-120"/>
+              </a:rPr>
+              <a:t>A flock of 24 swans flew over a lake. 12 dived in to swim, 6 flew east, and the rest flew to the west. How many flew west?</a:t>
+            </a:r>
+            <a:endParaRPr lang="en-US" sz="1300" dirty="0"/>
+          </a:p>
+        </p:txBody>
+      </p:sp>
+      <p:sp>
+        <p:nvSpPr>
+          <p:cNvPr id="7" name="Text 5"/>
+          <p:cNvSpPr/>
+          <p:nvPr/>
+        </p:nvSpPr>
+        <p:spPr>
+          <a:xfrm>
+            <a:off x="406301" y="1815405"/>
+            <a:ext cx="8498026" cy="213271"/>
+          </a:xfrm>
+          <a:prstGeom prst="rect">
+            <a:avLst/>
+          </a:prstGeom>
+          <a:noFill/>
+          <a:ln/>
+        </p:spPr>
+        <p:txBody>
+          <a:bodyPr wrap="square" lIns="0" tIns="0" rIns="0" bIns="0" rtlCol="0" anchor="t"/>
+          <a:lstStyle/>
+          <a:p>
+            <a:pPr algn="l" indent="0" marL="0">
+              <a:lnSpc>
+                <a:spcPts val="1680"/>
+              </a:lnSpc>
+              <a:spcBef>
+                <a:spcPts val="300"/>
+              </a:spcBef>
+              <a:spcAft>
+                <a:spcPts val="300"/>
+              </a:spcAft>
+              <a:buNone/>
+            </a:pPr>
+            <a:r>
+              <a:rPr lang="en-US" sz="1200" dirty="0">
+                <a:solidFill>
+                  <a:srgbClr val="2C2C2C"/>
+                </a:solidFill>
+                <a:latin typeface="Verdana" pitchFamily="34" charset="0"/>
+                <a:ea typeface="Verdana" pitchFamily="34" charset="-122"/>
+                <a:cs typeface="Verdana" pitchFamily="34" charset="-120"/>
+              </a:rPr>
+              <a:t>(Answer: 24 − 12 − 6 = 6)</a:t>
+            </a:r>
+            <a:endParaRPr lang="en-US" sz="1200" dirty="0"/>
+          </a:p>
+        </p:txBody>
+      </p:sp>
+      <p:sp>
+        <p:nvSpPr>
+          <p:cNvPr id="8" name="Text 6"/>
           <p:cNvSpPr/>
           <p:nvPr/>
         </p:nvSpPr>
@@ -3964,7 +4456,7 @@
                 <a:ea typeface="Georgia" pitchFamily="34" charset="-122"/>
                 <a:cs typeface="Georgia" pitchFamily="34" charset="-120"/>
               </a:rPr>
-              <a:t>Homework</a:t>
+              <a:t>Try a fast trick (12 min)</a:t>
             </a:r>
             <a:endParaRPr lang="en-US" sz="1800" dirty="0"/>
           </a:p>
@@ -4012,7 +4504,30 @@
                 <a:ea typeface="Verdana" pitchFamily="34" charset="-122"/>
                 <a:cs typeface="Verdana" pitchFamily="34" charset="-120"/>
               </a:rPr>
-              <a:t>– Try 5 multiplication by 11 problems with a parent.</a:t>
+              <a:t>Teach: </a:t>
+            </a:r>
+            <a:pPr algn="l" indent="0" marL="0">
+              <a:lnSpc>
+                <a:spcPts val="1680"/>
+              </a:lnSpc>
+              <a:spcBef>
+                <a:spcPts val="300"/>
+              </a:spcBef>
+              <a:spcAft>
+                <a:spcPts val="300"/>
+              </a:spcAft>
+              <a:buNone/>
+            </a:pPr>
+            <a:r>
+              <a:rPr lang="en-US" sz="1200" b="1" dirty="0">
+                <a:solidFill>
+                  <a:srgbClr val="2C2C2C"/>
+                </a:solidFill>
+                <a:latin typeface="Verdana" pitchFamily="34" charset="0"/>
+                <a:ea typeface="Verdana" pitchFamily="34" charset="-122"/>
+                <a:cs typeface="Verdana" pitchFamily="34" charset="-120"/>
+              </a:rPr>
+              <a:t>Multiplying by 11.</a:t>
             </a:r>
             <a:endParaRPr lang="en-US" sz="1200" dirty="0"/>
           </a:p>
@@ -4021,6 +4536,255 @@
       <p:sp>
         <p:nvSpPr>
           <p:cNvPr id="5" name="Text 3"/>
+          <p:cNvSpPr/>
+          <p:nvPr/>
+        </p:nvSpPr>
+        <p:spPr>
+          <a:xfrm>
+            <a:off x="406301" y="1160413"/>
+            <a:ext cx="8498026" cy="213271"/>
+          </a:xfrm>
+          <a:prstGeom prst="rect">
+            <a:avLst/>
+          </a:prstGeom>
+          <a:noFill/>
+          <a:ln/>
+        </p:spPr>
+        <p:txBody>
+          <a:bodyPr wrap="square" lIns="0" tIns="0" rIns="0" bIns="0" rtlCol="0" anchor="t"/>
+          <a:lstStyle/>
+          <a:p>
+            <a:pPr algn="l" indent="0" marL="0">
+              <a:lnSpc>
+                <a:spcPts val="1680"/>
+              </a:lnSpc>
+              <a:spcBef>
+                <a:spcPts val="300"/>
+              </a:spcBef>
+              <a:spcAft>
+                <a:spcPts val="300"/>
+              </a:spcAft>
+              <a:buNone/>
+            </a:pPr>
+            <a:r>
+              <a:rPr lang="en-US" sz="1200" dirty="0">
+                <a:solidFill>
+                  <a:srgbClr val="2C2C2C"/>
+                </a:solidFill>
+                <a:latin typeface="Verdana" pitchFamily="34" charset="0"/>
+                <a:ea typeface="Verdana" pitchFamily="34" charset="-122"/>
+                <a:cs typeface="Verdana" pitchFamily="34" charset="-120"/>
+              </a:rPr>
+              <a:t>Take any 2-digit number: </a:t>
+            </a:r>
+            <a:pPr algn="l" indent="0" marL="0">
+              <a:lnSpc>
+                <a:spcPts val="1680"/>
+              </a:lnSpc>
+              <a:spcBef>
+                <a:spcPts val="300"/>
+              </a:spcBef>
+              <a:spcAft>
+                <a:spcPts val="300"/>
+              </a:spcAft>
+              <a:buNone/>
+            </a:pPr>
+            <a:r>
+              <a:rPr lang="en-US" sz="1200" b="1" dirty="0">
+                <a:solidFill>
+                  <a:srgbClr val="2C2C2C"/>
+                </a:solidFill>
+                <a:latin typeface="Verdana" pitchFamily="34" charset="0"/>
+                <a:ea typeface="Verdana" pitchFamily="34" charset="-122"/>
+                <a:cs typeface="Verdana" pitchFamily="34" charset="-120"/>
+              </a:rPr>
+              <a:t>23.</a:t>
+            </a:r>
+            <a:endParaRPr lang="en-US" sz="1200" dirty="0"/>
+          </a:p>
+        </p:txBody>
+      </p:sp>
+      <p:sp>
+        <p:nvSpPr>
+          <p:cNvPr id="6" name="Text 4"/>
+          <p:cNvSpPr/>
+          <p:nvPr/>
+        </p:nvSpPr>
+        <p:spPr>
+          <a:xfrm>
+            <a:off x="634901" y="1462534"/>
+            <a:ext cx="8102798" cy="1013222"/>
+          </a:xfrm>
+          <a:prstGeom prst="rect">
+            <a:avLst/>
+          </a:prstGeom>
+          <a:noFill/>
+          <a:ln/>
+        </p:spPr>
+        <p:txBody>
+          <a:bodyPr wrap="square" lIns="0" tIns="0" rIns="0" bIns="0" rtlCol="0" anchor="t"/>
+          <a:lstStyle/>
+          <a:p>
+            <a:pPr algn="l" marL="342900" indent="-342900">
+              <a:lnSpc>
+                <a:spcPts val="1620"/>
+              </a:lnSpc>
+              <a:spcAft>
+                <a:spcPts val="300"/>
+              </a:spcAft>
+              <a:buSzPct val="100000"/>
+              <a:buChar char="•"/>
+            </a:pPr>
+            <a:r>
+              <a:rPr lang="en-US" sz="1200" dirty="0">
+                <a:solidFill>
+                  <a:srgbClr val="2C2C2C"/>
+                </a:solidFill>
+                <a:latin typeface="Verdana" pitchFamily="34" charset="0"/>
+                <a:ea typeface="Verdana" pitchFamily="34" charset="-122"/>
+                <a:cs typeface="Verdana" pitchFamily="34" charset="-120"/>
+              </a:rPr>
+              <a:t>Split: 2 _ 3</a:t>
+            </a:r>
+            <a:endParaRPr lang="en-US" sz="1200" dirty="0"/>
+          </a:p>
+          <a:p>
+            <a:pPr algn="l" marL="342900" indent="-342900">
+              <a:lnSpc>
+                <a:spcPts val="1620"/>
+              </a:lnSpc>
+              <a:spcAft>
+                <a:spcPts val="300"/>
+              </a:spcAft>
+              <a:buSzPct val="100000"/>
+              <a:buChar char="•"/>
+            </a:pPr>
+            <a:r>
+              <a:rPr lang="en-US" sz="1200" dirty="0">
+                <a:solidFill>
+                  <a:srgbClr val="2C2C2C"/>
+                </a:solidFill>
+                <a:latin typeface="Verdana" pitchFamily="34" charset="0"/>
+                <a:ea typeface="Verdana" pitchFamily="34" charset="-122"/>
+                <a:cs typeface="Verdana" pitchFamily="34" charset="-120"/>
+              </a:rPr>
+              <a:t>Add the digits: 2+3 = 5</a:t>
+            </a:r>
+            <a:endParaRPr lang="en-US" sz="1200" dirty="0"/>
+          </a:p>
+          <a:p>
+            <a:pPr algn="l" marL="342900" indent="-342900">
+              <a:lnSpc>
+                <a:spcPts val="1620"/>
+              </a:lnSpc>
+              <a:spcAft>
+                <a:spcPts val="300"/>
+              </a:spcAft>
+              <a:buSzPct val="100000"/>
+              <a:buChar char="•"/>
+            </a:pPr>
+            <a:r>
+              <a:rPr lang="en-US" sz="1200" dirty="0">
+                <a:solidFill>
+                  <a:srgbClr val="2C2C2C"/>
+                </a:solidFill>
+                <a:latin typeface="Verdana" pitchFamily="34" charset="0"/>
+                <a:ea typeface="Verdana" pitchFamily="34" charset="-122"/>
+                <a:cs typeface="Verdana" pitchFamily="34" charset="-120"/>
+              </a:rPr>
+              <a:t>Put the sum in the middle: </a:t>
+            </a:r>
+            <a:pPr algn="l" indent="0" marL="0">
+              <a:lnSpc>
+                <a:spcPts val="1620"/>
+              </a:lnSpc>
+              <a:spcAft>
+                <a:spcPts val="300"/>
+              </a:spcAft>
+              <a:buNone/>
+            </a:pPr>
+            <a:r>
+              <a:rPr lang="en-US" sz="1200" b="1" dirty="0">
+                <a:solidFill>
+                  <a:srgbClr val="2C2C2C"/>
+                </a:solidFill>
+                <a:latin typeface="Verdana" pitchFamily="34" charset="0"/>
+                <a:ea typeface="Verdana" pitchFamily="34" charset="-122"/>
+                <a:cs typeface="Verdana" pitchFamily="34" charset="-120"/>
+              </a:rPr>
+              <a:t>253</a:t>
+            </a:r>
+            <a:endParaRPr lang="en-US" sz="1200" dirty="0"/>
+          </a:p>
+          <a:p>
+            <a:pPr algn="l" marL="342900" indent="-342900">
+              <a:lnSpc>
+                <a:spcPts val="1620"/>
+              </a:lnSpc>
+              <a:spcAft>
+                <a:spcPts val="300"/>
+              </a:spcAft>
+              <a:buSzPct val="100000"/>
+              <a:buChar char="•"/>
+            </a:pPr>
+            <a:r>
+              <a:rPr lang="en-US" sz="1200" dirty="0">
+                <a:solidFill>
+                  <a:srgbClr val="2C2C2C"/>
+                </a:solidFill>
+                <a:latin typeface="Verdana" pitchFamily="34" charset="0"/>
+                <a:ea typeface="Verdana" pitchFamily="34" charset="-122"/>
+                <a:cs typeface="Verdana" pitchFamily="34" charset="-120"/>
+              </a:rPr>
+              <a:t>So 23 × 11 = </a:t>
+            </a:r>
+            <a:pPr algn="l" indent="0" marL="0">
+              <a:lnSpc>
+                <a:spcPts val="1620"/>
+              </a:lnSpc>
+              <a:spcAft>
+                <a:spcPts val="300"/>
+              </a:spcAft>
+              <a:buNone/>
+            </a:pPr>
+            <a:r>
+              <a:rPr lang="en-US" sz="1200" b="1" dirty="0">
+                <a:solidFill>
+                  <a:srgbClr val="2C2C2C"/>
+                </a:solidFill>
+                <a:latin typeface="Verdana" pitchFamily="34" charset="0"/>
+                <a:ea typeface="Verdana" pitchFamily="34" charset="-122"/>
+                <a:cs typeface="Verdana" pitchFamily="34" charset="-120"/>
+              </a:rPr>
+              <a:t>253</a:t>
+            </a:r>
+            <a:pPr algn="l" indent="0" marL="0">
+              <a:lnSpc>
+                <a:spcPts val="1620"/>
+              </a:lnSpc>
+              <a:spcAft>
+                <a:spcPts val="300"/>
+              </a:spcAft>
+              <a:buNone/>
+            </a:pPr>
+            <a:r>
+              <a:rPr lang="en-US" sz="1200" dirty="0">
+                <a:solidFill>
+                  <a:srgbClr val="2C2C2C"/>
+                </a:solidFill>
+                <a:latin typeface="Verdana" pitchFamily="34" charset="0"/>
+                <a:ea typeface="Verdana" pitchFamily="34" charset="-122"/>
+                <a:cs typeface="Verdana" pitchFamily="34" charset="-120"/>
+              </a:rPr>
+              <a:t>!</a:t>
+            </a:r>
+            <a:endParaRPr lang="en-US" sz="1200" dirty="0"/>
+          </a:p>
+        </p:txBody>
+      </p:sp>
+      <p:sp>
+        <p:nvSpPr>
+          <p:cNvPr id="7" name="Text 5"/>
           <p:cNvSpPr/>
           <p:nvPr/>
         </p:nvSpPr>
@@ -4170,7 +4934,7 @@
                 <a:ea typeface="Georgia" pitchFamily="34" charset="-122"/>
                 <a:cs typeface="Georgia" pitchFamily="34" charset="-120"/>
               </a:rPr>
-              <a:t>Differentiation</a:t>
+              <a:t>Try a fast trick (12 min) (cont.)</a:t>
             </a:r>
             <a:endParaRPr lang="en-US" sz="1800" dirty="0"/>
           </a:p>
@@ -4184,8 +4948,8 @@
         </p:nvSpPr>
         <p:spPr>
           <a:xfrm>
-            <a:off x="634901" y="883593"/>
-            <a:ext cx="8102798" cy="525661"/>
+            <a:off x="406301" y="870942"/>
+            <a:ext cx="8498026" cy="213271"/>
           </a:xfrm>
           <a:prstGeom prst="rect">
             <a:avLst/>
@@ -4197,18 +4961,20 @@
           <a:bodyPr wrap="square" lIns="0" tIns="0" rIns="0" bIns="0" rtlCol="0" anchor="t"/>
           <a:lstStyle/>
           <a:p>
-            <a:pPr algn="l" marL="342900" indent="-342900">
-              <a:lnSpc>
-                <a:spcPts val="1620"/>
-              </a:lnSpc>
-              <a:spcAft>
-                <a:spcPts val="300"/>
-              </a:spcAft>
-              <a:buSzPct val="100000"/>
-              <a:buChar char="•"/>
-            </a:pPr>
-            <a:r>
-              <a:rPr lang="en-US" sz="1200" b="1" dirty="0">
+            <a:pPr algn="l" indent="0" marL="0">
+              <a:lnSpc>
+                <a:spcPts val="1680"/>
+              </a:lnSpc>
+              <a:spcBef>
+                <a:spcPts val="300"/>
+              </a:spcBef>
+              <a:spcAft>
+                <a:spcPts val="300"/>
+              </a:spcAft>
+              <a:buNone/>
+            </a:pPr>
+            <a:r>
+              <a:rPr lang="en-US" sz="1200" dirty="0">
                 <a:solidFill>
                   <a:srgbClr val="2C2C2C"/>
                 </a:solidFill>
@@ -4216,12 +4982,40 @@
                 <a:ea typeface="Verdana" pitchFamily="34" charset="-122"/>
                 <a:cs typeface="Verdana" pitchFamily="34" charset="-120"/>
               </a:rPr>
-              <a:t>Tier up:</a:t>
-            </a:r>
+              <a:t>Try together: 41 × 11? 52 × 11? 63 × 11?</a:t>
+            </a:r>
+            <a:endParaRPr lang="en-US" sz="1200" dirty="0"/>
+          </a:p>
+        </p:txBody>
+      </p:sp>
+      <p:sp>
+        <p:nvSpPr>
+          <p:cNvPr id="5" name="Text 3"/>
+          <p:cNvSpPr/>
+          <p:nvPr/>
+        </p:nvSpPr>
+        <p:spPr>
+          <a:xfrm>
+            <a:off x="406301" y="1160413"/>
+            <a:ext cx="8498026" cy="213271"/>
+          </a:xfrm>
+          <a:prstGeom prst="rect">
+            <a:avLst/>
+          </a:prstGeom>
+          <a:noFill/>
+          <a:ln/>
+        </p:spPr>
+        <p:txBody>
+          <a:bodyPr wrap="square" lIns="0" tIns="0" rIns="0" bIns="0" rtlCol="0" anchor="t"/>
+          <a:lstStyle/>
+          <a:p>
             <a:pPr algn="l" indent="0" marL="0">
               <a:lnSpc>
-                <a:spcPts val="1620"/>
-              </a:lnSpc>
+                <a:spcPts val="1680"/>
+              </a:lnSpc>
+              <a:spcBef>
+                <a:spcPts val="300"/>
+              </a:spcBef>
               <a:spcAft>
                 <a:spcPts val="300"/>
               </a:spcAft>
@@ -4236,59 +5030,15 @@
                 <a:ea typeface="Verdana" pitchFamily="34" charset="-122"/>
                 <a:cs typeface="Verdana" pitchFamily="34" charset="-120"/>
               </a:rPr>
-              <a:t> Try the trick with carries (78 × 11 = 858).</a:t>
+              <a:t>(For carries — 78 × 11 = 7(7+8)8 = 7(15)8 = 858 — slightly trickier, skip if too hard.)</a:t>
             </a:r>
             <a:endParaRPr lang="en-US" sz="1200" dirty="0"/>
           </a:p>
-          <a:p>
-            <a:pPr algn="l" marL="342900" indent="-342900">
-              <a:lnSpc>
-                <a:spcPts val="1620"/>
-              </a:lnSpc>
-              <a:spcAft>
-                <a:spcPts val="300"/>
-              </a:spcAft>
-              <a:buSzPct val="100000"/>
-              <a:buChar char="•"/>
-            </a:pPr>
-            <a:r>
-              <a:rPr lang="en-US" sz="1200" b="1" dirty="0">
-                <a:solidFill>
-                  <a:srgbClr val="2C2C2C"/>
-                </a:solidFill>
-                <a:latin typeface="Verdana" pitchFamily="34" charset="0"/>
-                <a:ea typeface="Verdana" pitchFamily="34" charset="-122"/>
-                <a:cs typeface="Verdana" pitchFamily="34" charset="-120"/>
-              </a:rPr>
-              <a:t>Tier down:</a:t>
-            </a:r>
-            <a:pPr algn="l" indent="0" marL="0">
-              <a:lnSpc>
-                <a:spcPts val="1620"/>
-              </a:lnSpc>
-              <a:spcAft>
-                <a:spcPts val="300"/>
-              </a:spcAft>
-              <a:buNone/>
-            </a:pPr>
-            <a:r>
-              <a:rPr lang="en-US" sz="1200" dirty="0">
-                <a:solidFill>
-                  <a:srgbClr val="2C2C2C"/>
-                </a:solidFill>
-                <a:latin typeface="Verdana" pitchFamily="34" charset="0"/>
-                <a:ea typeface="Verdana" pitchFamily="34" charset="-122"/>
-                <a:cs typeface="Verdana" pitchFamily="34" charset="-120"/>
-              </a:rPr>
-              <a:t> Just remember: "multiplying by 11 has a quick trick."</a:t>
-            </a:r>
-            <a:endParaRPr lang="en-US" sz="1200" dirty="0"/>
-          </a:p>
-        </p:txBody>
-      </p:sp>
-      <p:sp>
-        <p:nvSpPr>
-          <p:cNvPr id="5" name="Text 3"/>
+        </p:txBody>
+      </p:sp>
+      <p:sp>
+        <p:nvSpPr>
+          <p:cNvPr id="6" name="Text 4"/>
           <p:cNvSpPr/>
           <p:nvPr/>
         </p:nvSpPr>
